--- a/data/employees/EMP026/AST-EMP026-01.pptx
+++ b/data/employees/EMP026/AST-EMP026-01.pptx
@@ -9,6 +9,7 @@
     <p:sldId id="257" r:id="rId8"/>
     <p:sldId id="258" r:id="rId9"/>
     <p:sldId id="259" r:id="rId10"/>
+    <p:sldId id="260" r:id="rId11"/>
   </p:sldIdLst>
   <p:sldSz cx="9144000" cy="6858000" type="screen4x3"/>
   <p:notesSz cx="6858000" cy="9144000"/>
@@ -3098,42 +3099,55 @@
             <a:spLocks noGrp="1"/>
           </p:cNvSpPr>
           <p:nvPr>
-            <p:ph type="ctrTitle"/>
-          </p:nvPr>
-        </p:nvSpPr>
-        <p:spPr/>
-        <p:txBody>
-          <a:bodyPr/>
-          <a:lstStyle/>
-          <a:p>
-            <a:r>
-              <a:t>Project update deck - EMP026</a:t>
-            </a:r>
-          </a:p>
-        </p:txBody>
-      </p:sp>
-      <p:sp>
-        <p:nvSpPr>
-          <p:cNvPr id="3" name="Subtitle 2"/>
-          <p:cNvSpPr>
-            <a:spLocks noGrp="1"/>
-          </p:cNvSpPr>
-          <p:nvPr>
-            <p:ph type="subTitle" idx="1"/>
-          </p:nvPr>
-        </p:nvSpPr>
-        <p:spPr/>
-        <p:txBody>
-          <a:bodyPr/>
-          <a:lstStyle/>
-          <a:p>
-            <a:r>
-              <a:t>Avery Wilson | Manager | HR</a:t>
-            </a:r>
-          </a:p>
-          <a:p>
-            <a:r>
-              <a:t>Prepared: 2025-01-28</a:t>
+            <p:ph type="title"/>
+          </p:nvPr>
+        </p:nvSpPr>
+        <p:spPr/>
+        <p:txBody>
+          <a:bodyPr/>
+          <a:lstStyle/>
+          <a:p>
+            <a:r>
+              <a:t>Ast Emp026 01 - EMP026</a:t>
+            </a:r>
+          </a:p>
+        </p:txBody>
+      </p:sp>
+      <p:sp>
+        <p:nvSpPr>
+          <p:cNvPr id="3" name="Content Placeholder 2"/>
+          <p:cNvSpPr>
+            <a:spLocks noGrp="1"/>
+          </p:cNvSpPr>
+          <p:nvPr>
+            <p:ph idx="1"/>
+          </p:nvPr>
+        </p:nvSpPr>
+        <p:spPr/>
+        <p:txBody>
+          <a:bodyPr/>
+          <a:lstStyle/>
+          <a:p>
+            <a:r>
+              <a:t>Slide 1: Executive Summary</a:t>
+            </a:r>
+          </a:p>
+          <a:p>
+            <a:pPr lvl="1"/>
+            <a:r>
+              <a:t>Section 1: Customer escalation analysis. EMP026 contributes to ast emp026 01 through recurring collaboration, clear ownership boundaries, and measurable outcomes. The team captures decisions, open issues, and handoffs so that knowledge remains discoverable for future programs.</a:t>
+            </a:r>
+          </a:p>
+          <a:p>
+            <a:pPr lvl="1"/>
+            <a:r>
+              <a:t>Section 2: Knowledge transfer and onboarding. EMP026 contributes to ast emp026 01 through recurring collaboration, clear ownership boundaries, and measurable outcomes. The team captures decisions, open issues, and handoffs so that knowledge remains discoverable for future programs.</a:t>
+            </a:r>
+          </a:p>
+          <a:p>
+            <a:pPr lvl="1"/>
+            <a:r>
+              <a:t>Section 3: Automation backlog refinement. EMP026 contributes to ast emp026 01 through recurring collaboration, clear ownership boundaries, and measurable outcomes. The team captures decisions, open issues, and handoffs so that knowledge remains discoverable for future programs.</a:t>
             </a:r>
           </a:p>
         </p:txBody>
@@ -3172,7 +3186,7 @@
           <a:lstStyle/>
           <a:p>
             <a:r>
-              <a:t>Q2 Talent Acquisition Update</a:t>
+              <a:t>Ast Emp026 01 - EMP026</a:t>
             </a:r>
           </a:p>
         </p:txBody>
@@ -3193,17 +3207,25 @@
           <a:lstStyle/>
           <a:p>
             <a:r>
-              <a:t>Overview of Q2 Talent Acquisition Update for HR department.</a:t>
-            </a:r>
-          </a:p>
-          <a:p>
-            <a:r>
-              <a:t>Responsible: Avery Wilson (Manager)</a:t>
-            </a:r>
-          </a:p>
-          <a:p>
-            <a:r>
-              <a:t>Location: Bengaluru | Skills: Synapse, Python, TypeScript, Ontology</a:t>
+              <a:t>Slide 2: Executive Summary</a:t>
+            </a:r>
+          </a:p>
+          <a:p>
+            <a:pPr lvl="1"/>
+            <a:r>
+              <a:t>Section 1: Department KPI performance. EMP026 contributes to ast emp026 01 through recurring collaboration, clear ownership boundaries, and measurable outcomes. The team captures decisions, open issues, and handoffs so that knowledge remains discoverable for future programs.</a:t>
+            </a:r>
+          </a:p>
+          <a:p>
+            <a:pPr lvl="1"/>
+            <a:r>
+              <a:t>Section 2: Customer escalation analysis. EMP026 contributes to ast emp026 01 through recurring collaboration, clear ownership boundaries, and measurable outcomes. The team captures decisions, open issues, and handoffs so that knowledge remains discoverable for future programs.</a:t>
+            </a:r>
+          </a:p>
+          <a:p>
+            <a:pPr lvl="1"/>
+            <a:r>
+              <a:t>Section 3: Department KPI performance. EMP026 contributes to ast emp026 01 through recurring collaboration, clear ownership boundaries, and measurable outcomes. The team captures decisions, open issues, and handoffs so that knowledge remains discoverable for future programs.</a:t>
             </a:r>
           </a:p>
         </p:txBody>
@@ -3242,7 +3264,7 @@
           <a:lstStyle/>
           <a:p>
             <a:r>
-              <a:t>Employee Engagement Scores</a:t>
+              <a:t>Ast Emp026 01 - EMP026</a:t>
             </a:r>
           </a:p>
         </p:txBody>
@@ -3263,17 +3285,25 @@
           <a:lstStyle/>
           <a:p>
             <a:r>
-              <a:t>Overview of Employee Engagement Scores for HR department.</a:t>
-            </a:r>
-          </a:p>
-          <a:p>
-            <a:r>
-              <a:t>Responsible: Avery Wilson (Manager)</a:t>
-            </a:r>
-          </a:p>
-          <a:p>
-            <a:r>
-              <a:t>Location: Bengaluru | Skills: Synapse, Python, TypeScript, Ontology</a:t>
+              <a:t>Slide 3: Executive Summary</a:t>
+            </a:r>
+          </a:p>
+          <a:p>
+            <a:pPr lvl="1"/>
+            <a:r>
+              <a:t>Section 1: Automation backlog refinement. EMP026 contributes to ast emp026 01 through recurring collaboration, clear ownership boundaries, and measurable outcomes. The team captures decisions, open issues, and handoffs so that knowledge remains discoverable for future programs.</a:t>
+            </a:r>
+          </a:p>
+          <a:p>
+            <a:pPr lvl="1"/>
+            <a:r>
+              <a:t>Section 2: Data quality remediation. EMP026 contributes to ast emp026 01 through recurring collaboration, clear ownership boundaries, and measurable outcomes. The team captures decisions, open issues, and handoffs so that knowledge remains discoverable for future programs.</a:t>
+            </a:r>
+          </a:p>
+          <a:p>
+            <a:pPr lvl="1"/>
+            <a:r>
+              <a:t>Section 3: Quarterly delivery milestones. EMP026 contributes to ast emp026 01 through recurring collaboration, clear ownership boundaries, and measurable outcomes. The team captures decisions, open issues, and handoffs so that knowledge remains discoverable for future programs.</a:t>
             </a:r>
           </a:p>
         </p:txBody>
@@ -3312,7 +3342,7 @@
           <a:lstStyle/>
           <a:p>
             <a:r>
-              <a:t>Learning &amp; Development Roadmap</a:t>
+              <a:t>Ast Emp026 01 - EMP026</a:t>
             </a:r>
           </a:p>
         </p:txBody>
@@ -3333,17 +3363,103 @@
           <a:lstStyle/>
           <a:p>
             <a:r>
-              <a:t>Overview of Learning &amp; Development Roadmap for HR department.</a:t>
-            </a:r>
-          </a:p>
-          <a:p>
-            <a:r>
-              <a:t>Responsible: Avery Wilson (Manager)</a:t>
-            </a:r>
-          </a:p>
-          <a:p>
-            <a:r>
-              <a:t>Location: Bengaluru | Skills: Synapse, Python, TypeScript, Ontology</a:t>
+              <a:t>Slide 4: Executive Summary</a:t>
+            </a:r>
+          </a:p>
+          <a:p>
+            <a:pPr lvl="1"/>
+            <a:r>
+              <a:t>Section 1: Data quality remediation. EMP026 contributes to ast emp026 01 through recurring collaboration, clear ownership boundaries, and measurable outcomes. The team captures decisions, open issues, and handoffs so that knowledge remains discoverable for future programs.</a:t>
+            </a:r>
+          </a:p>
+          <a:p>
+            <a:pPr lvl="1"/>
+            <a:r>
+              <a:t>Section 2: Data quality remediation. EMP026 contributes to ast emp026 01 through recurring collaboration, clear ownership boundaries, and measurable outcomes. The team captures decisions, open issues, and handoffs so that knowledge remains discoverable for future programs.</a:t>
+            </a:r>
+          </a:p>
+          <a:p>
+            <a:pPr lvl="1"/>
+            <a:r>
+              <a:t>Section 3: Customer escalation analysis. EMP026 contributes to ast emp026 01 through recurring collaboration, clear ownership boundaries, and measurable outcomes. The team captures decisions, open issues, and handoffs so that knowledge remains discoverable for future programs.</a:t>
+            </a:r>
+          </a:p>
+        </p:txBody>
+      </p:sp>
+    </p:spTree>
+  </p:cSld>
+  <p:clrMapOvr>
+    <a:masterClrMapping/>
+  </p:clrMapOvr>
+</p:sld>
+</file>
+
+<file path=ppt/slides/slide5.xml><?xml version="1.0" encoding="utf-8"?>
+<p:sld xmlns:a="http://schemas.openxmlformats.org/drawingml/2006/main" xmlns:p="http://schemas.openxmlformats.org/presentationml/2006/main" xmlns:r="http://schemas.openxmlformats.org/officeDocument/2006/relationships">
+  <p:cSld>
+    <p:spTree>
+      <p:nvGrpSpPr>
+        <p:cNvPr id="1" name=""/>
+        <p:cNvGrpSpPr/>
+        <p:nvPr/>
+      </p:nvGrpSpPr>
+      <p:grpSpPr/>
+      <p:sp>
+        <p:nvSpPr>
+          <p:cNvPr id="2" name="Title 1"/>
+          <p:cNvSpPr>
+            <a:spLocks noGrp="1"/>
+          </p:cNvSpPr>
+          <p:nvPr>
+            <p:ph type="title"/>
+          </p:nvPr>
+        </p:nvSpPr>
+        <p:spPr/>
+        <p:txBody>
+          <a:bodyPr/>
+          <a:lstStyle/>
+          <a:p>
+            <a:r>
+              <a:t>Ast Emp026 01 - EMP026</a:t>
+            </a:r>
+          </a:p>
+        </p:txBody>
+      </p:sp>
+      <p:sp>
+        <p:nvSpPr>
+          <p:cNvPr id="3" name="Content Placeholder 2"/>
+          <p:cNvSpPr>
+            <a:spLocks noGrp="1"/>
+          </p:cNvSpPr>
+          <p:nvPr>
+            <p:ph idx="1"/>
+          </p:nvPr>
+        </p:nvSpPr>
+        <p:spPr/>
+        <p:txBody>
+          <a:bodyPr/>
+          <a:lstStyle/>
+          <a:p>
+            <a:r>
+              <a:t>Slide 5: Executive Summary</a:t>
+            </a:r>
+          </a:p>
+          <a:p>
+            <a:pPr lvl="1"/>
+            <a:r>
+              <a:t>Section 1: Data quality remediation. EMP026 contributes to ast emp026 01 through recurring collaboration, clear ownership boundaries, and measurable outcomes. The team captures decisions, open issues, and handoffs so that knowledge remains discoverable for future programs.</a:t>
+            </a:r>
+          </a:p>
+          <a:p>
+            <a:pPr lvl="1"/>
+            <a:r>
+              <a:t>Section 2: Knowledge transfer and onboarding. EMP026 contributes to ast emp026 01 through recurring collaboration, clear ownership boundaries, and measurable outcomes. The team captures decisions, open issues, and handoffs so that knowledge remains discoverable for future programs.</a:t>
+            </a:r>
+          </a:p>
+          <a:p>
+            <a:pPr lvl="1"/>
+            <a:r>
+              <a:t>Section 3: Data quality remediation. EMP026 contributes to ast emp026 01 through recurring collaboration, clear ownership boundaries, and measurable outcomes. The team captures decisions, open issues, and handoffs so that knowledge remains discoverable for future programs.</a:t>
             </a:r>
           </a:p>
         </p:txBody>
